--- a/topic-06-week6/unit-2/talk-3-vslm/Presentation1.pptx
+++ b/topic-06-week6/unit-2/talk-3-vslm/Presentation1.pptx
@@ -5478,6 +5478,520 @@
 </p:notes>
 </file>
 
+<file path=ppt/notesSlides/notesSlide15.xml><?xml version="1.0" encoding="utf-8"?>
+<p:notes xmlns:a="http://schemas.openxmlformats.org/drawingml/2006/main" xmlns:r="http://schemas.openxmlformats.org/officeDocument/2006/relationships" xmlns:p="http://schemas.openxmlformats.org/presentationml/2006/main">
+  <p:cSld>
+    <p:spTree>
+      <p:nvGrpSpPr>
+        <p:cNvPr id="1" name=""/>
+        <p:cNvGrpSpPr/>
+        <p:nvPr/>
+      </p:nvGrpSpPr>
+      <p:grpSpPr>
+        <a:xfrm>
+          <a:off x="0" y="0"/>
+          <a:ext cx="0" cy="0"/>
+          <a:chOff x="0" y="0"/>
+          <a:chExt cx="0" cy="0"/>
+        </a:xfrm>
+      </p:grpSpPr>
+      <p:sp>
+        <p:nvSpPr>
+          <p:cNvPr id="2" name="Slide Image Placeholder 1"/>
+          <p:cNvSpPr>
+            <a:spLocks noGrp="1" noRot="1" noChangeAspect="1"/>
+          </p:cNvSpPr>
+          <p:nvPr>
+            <p:ph type="sldImg"/>
+          </p:nvPr>
+        </p:nvSpPr>
+        <p:spPr/>
+      </p:sp>
+      <p:sp>
+        <p:nvSpPr>
+          <p:cNvPr id="3" name="Notes Placeholder 2"/>
+          <p:cNvSpPr>
+            <a:spLocks noGrp="1"/>
+          </p:cNvSpPr>
+          <p:nvPr>
+            <p:ph type="body" idx="1"/>
+          </p:nvPr>
+        </p:nvSpPr>
+        <p:spPr/>
+        <p:txBody>
+          <a:bodyPr/>
+          <a:lstStyle/>
+          <a:p>
+            <a:r>
+              <a:rPr lang="en-GB" dirty="0"/>
+              <a:t>First, at the </a:t>
+            </a:r>
+            <a:r>
+              <a:rPr lang="en-GB" b="1" dirty="0"/>
+              <a:t>local or internal level</a:t>
+            </a:r>
+            <a:r>
+              <a:rPr lang="en-GB" dirty="0"/>
+              <a:t>, organisations use </a:t>
+            </a:r>
+            <a:r>
+              <a:rPr lang="en-GB" b="1" dirty="0"/>
+              <a:t>subnetting</a:t>
+            </a:r>
+            <a:r>
+              <a:rPr lang="en-GB" dirty="0"/>
+              <a:t> to split a larger network into smaller networks. This helps with things like </a:t>
+            </a:r>
+            <a:r>
+              <a:rPr lang="en-GB" b="1" dirty="0"/>
+              <a:t>department separation, security boundaries, performance</a:t>
+            </a:r>
+            <a:r>
+              <a:rPr lang="en-GB" dirty="0"/>
+              <a:t>, and easier troubleshooting. For example, HR, Finance, and Students could each be on different subnets.</a:t>
+            </a:r>
+          </a:p>
+          <a:p>
+            <a:r>
+              <a:rPr lang="en-GB" dirty="0"/>
+              <a:t>However, when we move to a </a:t>
+            </a:r>
+            <a:r>
+              <a:rPr lang="en-GB" b="1" dirty="0"/>
+              <a:t>higher level</a:t>
+            </a:r>
+            <a:r>
+              <a:rPr lang="en-GB" dirty="0"/>
+              <a:t>, especially when advertising routes to an </a:t>
+            </a:r>
+            <a:r>
+              <a:rPr lang="en-GB" b="1" dirty="0"/>
+              <a:t>ISP or external networks</a:t>
+            </a:r>
+            <a:r>
+              <a:rPr lang="en-GB" dirty="0"/>
+              <a:t>, advertising every single subnet would create too many routes. That’s where </a:t>
+            </a:r>
+            <a:r>
+              <a:rPr lang="en-GB" b="1" dirty="0" err="1"/>
+              <a:t>supernetting</a:t>
+            </a:r>
+            <a:r>
+              <a:rPr lang="en-GB" dirty="0"/>
+              <a:t> comes in.</a:t>
+            </a:r>
+          </a:p>
+          <a:p>
+            <a:r>
+              <a:rPr lang="en-GB" dirty="0"/>
+              <a:t>With </a:t>
+            </a:r>
+            <a:r>
+              <a:rPr lang="en-GB" dirty="0" err="1"/>
+              <a:t>supernetting</a:t>
+            </a:r>
+            <a:r>
+              <a:rPr lang="en-GB" dirty="0"/>
+              <a:t>, instead of advertising multiple separate subnet routes, the organisation advertises </a:t>
+            </a:r>
+            <a:r>
+              <a:rPr lang="en-GB" b="1" dirty="0"/>
+              <a:t>one summarized or aggregated route</a:t>
+            </a:r>
+            <a:r>
+              <a:rPr lang="en-GB" dirty="0"/>
+              <a:t>. This reduces the number of routes other networks must store, which makes routing tables smaller and routing more efficient.</a:t>
+            </a:r>
+          </a:p>
+          <a:p>
+            <a:r>
+              <a:rPr lang="en-GB" dirty="0"/>
+              <a:t>So the key idea is:</a:t>
+            </a:r>
+            <a:br>
+              <a:rPr lang="en-GB" dirty="0"/>
+            </a:br>
+            <a:r>
+              <a:rPr lang="en-GB" b="1" dirty="0"/>
+              <a:t>Subnetting gives detailed control internally</a:t>
+            </a:r>
+            <a:r>
+              <a:rPr lang="en-GB" dirty="0"/>
+              <a:t>, while </a:t>
+            </a:r>
+            <a:r>
+              <a:rPr lang="en-GB" b="1" dirty="0" err="1"/>
+              <a:t>supernetting</a:t>
+            </a:r>
+            <a:r>
+              <a:rPr lang="en-GB" b="1" dirty="0"/>
+              <a:t> gives a simplified view externally</a:t>
+            </a:r>
+            <a:r>
+              <a:rPr lang="en-GB" dirty="0"/>
+              <a:t>.</a:t>
+            </a:r>
+            <a:br>
+              <a:rPr lang="en-GB" dirty="0"/>
+            </a:br>
+            <a:r>
+              <a:rPr lang="en-GB" dirty="0"/>
+              <a:t>Together, they allow networks to stay organised inside, but scalable and efficient when communicating with the outside world.”</a:t>
+            </a:r>
+          </a:p>
+          <a:p>
+            <a:endParaRPr lang="en-GB" dirty="0"/>
+          </a:p>
+        </p:txBody>
+      </p:sp>
+      <p:sp>
+        <p:nvSpPr>
+          <p:cNvPr id="4" name="Slide Number Placeholder 3"/>
+          <p:cNvSpPr>
+            <a:spLocks noGrp="1"/>
+          </p:cNvSpPr>
+          <p:nvPr>
+            <p:ph type="sldNum" sz="quarter" idx="5"/>
+          </p:nvPr>
+        </p:nvSpPr>
+        <p:spPr/>
+        <p:txBody>
+          <a:bodyPr/>
+          <a:lstStyle/>
+          <a:p>
+            <a:fld id="{FD069BF9-EF94-48C3-9509-8AE0DD47CC15}" type="slidenum">
+              <a:rPr lang="en-IE" smtClean="0"/>
+              <a:t>30</a:t>
+            </a:fld>
+            <a:endParaRPr lang="en-IE"/>
+          </a:p>
+        </p:txBody>
+      </p:sp>
+    </p:spTree>
+    <p:extLst>
+      <p:ext uri="{BB962C8B-B14F-4D97-AF65-F5344CB8AC3E}">
+        <p14:creationId xmlns:p14="http://schemas.microsoft.com/office/powerpoint/2010/main" val="18441065"/>
+      </p:ext>
+    </p:extLst>
+  </p:cSld>
+  <p:clrMapOvr>
+    <a:masterClrMapping/>
+  </p:clrMapOvr>
+</p:notes>
+</file>
+
+<file path=ppt/notesSlides/notesSlide16.xml><?xml version="1.0" encoding="utf-8"?>
+<p:notes xmlns:a="http://schemas.openxmlformats.org/drawingml/2006/main" xmlns:r="http://schemas.openxmlformats.org/officeDocument/2006/relationships" xmlns:p="http://schemas.openxmlformats.org/presentationml/2006/main">
+  <p:cSld>
+    <p:spTree>
+      <p:nvGrpSpPr>
+        <p:cNvPr id="1" name=""/>
+        <p:cNvGrpSpPr/>
+        <p:nvPr/>
+      </p:nvGrpSpPr>
+      <p:grpSpPr>
+        <a:xfrm>
+          <a:off x="0" y="0"/>
+          <a:ext cx="0" cy="0"/>
+          <a:chOff x="0" y="0"/>
+          <a:chExt cx="0" cy="0"/>
+        </a:xfrm>
+      </p:grpSpPr>
+      <p:sp>
+        <p:nvSpPr>
+          <p:cNvPr id="2" name="Slide Image Placeholder 1"/>
+          <p:cNvSpPr>
+            <a:spLocks noGrp="1" noRot="1" noChangeAspect="1"/>
+          </p:cNvSpPr>
+          <p:nvPr>
+            <p:ph type="sldImg"/>
+          </p:nvPr>
+        </p:nvSpPr>
+        <p:spPr/>
+      </p:sp>
+      <p:sp>
+        <p:nvSpPr>
+          <p:cNvPr id="3" name="Notes Placeholder 2"/>
+          <p:cNvSpPr>
+            <a:spLocks noGrp="1"/>
+          </p:cNvSpPr>
+          <p:nvPr>
+            <p:ph type="body" idx="1"/>
+          </p:nvPr>
+        </p:nvSpPr>
+        <p:spPr/>
+        <p:txBody>
+          <a:bodyPr/>
+          <a:lstStyle/>
+          <a:p>
+            <a:r>
+              <a:rPr lang="en-GB" dirty="0"/>
+              <a:t>We are given four /24 networks:</a:t>
+            </a:r>
+            <a:br>
+              <a:rPr lang="en-GB" dirty="0"/>
+            </a:br>
+            <a:r>
+              <a:rPr lang="en-GB" b="1" dirty="0"/>
+              <a:t>192.168.0.0/24</a:t>
+            </a:r>
+            <a:r>
+              <a:rPr lang="en-GB" dirty="0"/>
+              <a:t>, </a:t>
+            </a:r>
+            <a:r>
+              <a:rPr lang="en-GB" b="1" dirty="0"/>
+              <a:t>192.168.1.0/24</a:t>
+            </a:r>
+            <a:r>
+              <a:rPr lang="en-GB" dirty="0"/>
+              <a:t>, </a:t>
+            </a:r>
+            <a:r>
+              <a:rPr lang="en-GB" b="1" dirty="0"/>
+              <a:t>192.168.2.0/24</a:t>
+            </a:r>
+            <a:r>
+              <a:rPr lang="en-GB" dirty="0"/>
+              <a:t>, and </a:t>
+            </a:r>
+            <a:r>
+              <a:rPr lang="en-GB" b="1" dirty="0"/>
+              <a:t>192.168.3.0/24</a:t>
+            </a:r>
+            <a:r>
+              <a:rPr lang="en-GB" dirty="0"/>
+              <a:t>.</a:t>
+            </a:r>
+          </a:p>
+          <a:p>
+            <a:r>
+              <a:rPr lang="en-GB" dirty="0"/>
+              <a:t>Step one is to write the network addresses in </a:t>
+            </a:r>
+            <a:r>
+              <a:rPr lang="en-GB" b="1" dirty="0"/>
+              <a:t>binary</a:t>
+            </a:r>
+            <a:r>
+              <a:rPr lang="en-GB" dirty="0"/>
+              <a:t>.</a:t>
+            </a:r>
+            <a:br>
+              <a:rPr lang="en-GB" dirty="0"/>
+            </a:br>
+            <a:r>
+              <a:rPr lang="en-GB" dirty="0"/>
+              <a:t>Notice that the first two octets, </a:t>
+            </a:r>
+            <a:r>
+              <a:rPr lang="en-GB" b="1" dirty="0"/>
+              <a:t>192.168</a:t>
+            </a:r>
+            <a:r>
+              <a:rPr lang="en-GB" dirty="0"/>
+              <a:t>, are identical in all cases. The difference happens in the </a:t>
+            </a:r>
+            <a:r>
+              <a:rPr lang="en-GB" b="1" dirty="0"/>
+              <a:t>third octet</a:t>
+            </a:r>
+            <a:r>
+              <a:rPr lang="en-GB" dirty="0"/>
+              <a:t>, where we have 0, 1, 2, and 3. In binary, those are:</a:t>
+            </a:r>
+            <a:br>
+              <a:rPr lang="en-GB" dirty="0"/>
+            </a:br>
+            <a:r>
+              <a:rPr lang="en-GB" dirty="0"/>
+              <a:t>0 = 00</a:t>
+            </a:r>
+            <a:br>
+              <a:rPr lang="en-GB" dirty="0"/>
+            </a:br>
+            <a:r>
+              <a:rPr lang="en-GB" dirty="0"/>
+              <a:t>1 = 01</a:t>
+            </a:r>
+            <a:br>
+              <a:rPr lang="en-GB" dirty="0"/>
+            </a:br>
+            <a:r>
+              <a:rPr lang="en-GB" dirty="0"/>
+              <a:t>2 = 10</a:t>
+            </a:r>
+            <a:br>
+              <a:rPr lang="en-GB" dirty="0"/>
+            </a:br>
+            <a:r>
+              <a:rPr lang="en-GB" dirty="0"/>
+              <a:t>3 = 11</a:t>
+            </a:r>
+          </a:p>
+          <a:p>
+            <a:r>
+              <a:rPr lang="en-GB" dirty="0"/>
+              <a:t>Now step two: we compare from </a:t>
+            </a:r>
+            <a:r>
+              <a:rPr lang="en-GB" b="1" dirty="0"/>
+              <a:t>left to right</a:t>
+            </a:r>
+            <a:r>
+              <a:rPr lang="en-GB" dirty="0"/>
+              <a:t> and find the bits that match across all four networks.</a:t>
+            </a:r>
+            <a:br>
+              <a:rPr lang="en-GB" dirty="0"/>
+            </a:br>
+            <a:r>
+              <a:rPr lang="en-GB" dirty="0"/>
+              <a:t>The key observation is that in the third octet, only the </a:t>
+            </a:r>
+            <a:r>
+              <a:rPr lang="en-GB" b="1" dirty="0"/>
+              <a:t>first 6 bits match</a:t>
+            </a:r>
+            <a:r>
+              <a:rPr lang="en-GB" dirty="0"/>
+              <a:t>, and the last 2 bits vary — that’s why we can summarise these four networks together.</a:t>
+            </a:r>
+          </a:p>
+          <a:p>
+            <a:r>
+              <a:rPr lang="en-GB" dirty="0"/>
+              <a:t>Step three: we keep the matching bits, and set the remaining bits to zero. That gives the summarised network address:</a:t>
+            </a:r>
+            <a:br>
+              <a:rPr lang="en-GB" dirty="0"/>
+            </a:br>
+            <a:r>
+              <a:rPr lang="en-GB" b="1" dirty="0"/>
+              <a:t>192.168.0.0</a:t>
+            </a:r>
+            <a:endParaRPr lang="en-GB" dirty="0"/>
+          </a:p>
+          <a:p>
+            <a:r>
+              <a:rPr lang="en-GB" dirty="0"/>
+              <a:t>Step four: we build the new subnet mask by placing 1s in the matching portion.</a:t>
+            </a:r>
+            <a:br>
+              <a:rPr lang="en-GB" dirty="0"/>
+            </a:br>
+            <a:r>
+              <a:rPr lang="en-GB" dirty="0"/>
+              <a:t>Because we grouped four /24 networks, we reduce the prefix by 2 bits, so the summarised prefix becomes </a:t>
+            </a:r>
+            <a:r>
+              <a:rPr lang="en-GB" b="1" dirty="0"/>
+              <a:t>/22</a:t>
+            </a:r>
+            <a:r>
+              <a:rPr lang="en-GB" dirty="0"/>
+              <a:t>.</a:t>
+            </a:r>
+          </a:p>
+          <a:p>
+            <a:r>
+              <a:rPr lang="en-GB" dirty="0"/>
+              <a:t>So the final result is:</a:t>
+            </a:r>
+            <a:br>
+              <a:rPr lang="en-GB" dirty="0"/>
+            </a:br>
+            <a:r>
+              <a:rPr lang="en-GB" dirty="0"/>
+              <a:t>✅ </a:t>
+            </a:r>
+            <a:r>
+              <a:rPr lang="en-GB" b="1" dirty="0"/>
+              <a:t>192.168.0.0/22</a:t>
+            </a:r>
+            <a:br>
+              <a:rPr lang="en-GB" dirty="0"/>
+            </a:br>
+            <a:r>
+              <a:rPr lang="en-GB" dirty="0"/>
+              <a:t>with subnet mask:</a:t>
+            </a:r>
+            <a:br>
+              <a:rPr lang="en-GB" dirty="0"/>
+            </a:br>
+            <a:r>
+              <a:rPr lang="en-GB" dirty="0"/>
+              <a:t>✅ </a:t>
+            </a:r>
+            <a:r>
+              <a:rPr lang="en-GB" b="1" dirty="0"/>
+              <a:t>255.255.252.0</a:t>
+            </a:r>
+            <a:endParaRPr lang="en-GB" dirty="0"/>
+          </a:p>
+          <a:p>
+            <a:r>
+              <a:rPr lang="en-GB" dirty="0"/>
+              <a:t>This means one route, </a:t>
+            </a:r>
+            <a:r>
+              <a:rPr lang="en-GB" b="1" dirty="0"/>
+              <a:t>192.168.0.0/22</a:t>
+            </a:r>
+            <a:r>
+              <a:rPr lang="en-GB" dirty="0"/>
+              <a:t>, now represents all four networks from </a:t>
+            </a:r>
+            <a:r>
+              <a:rPr lang="en-GB" b="1" dirty="0"/>
+              <a:t>192.168.0.0 to 192.168.3.255</a:t>
+            </a:r>
+            <a:r>
+              <a:rPr lang="en-GB" dirty="0"/>
+              <a:t>, making routing tables smaller and routing more efficient.”</a:t>
+            </a:r>
+          </a:p>
+          <a:p>
+            <a:endParaRPr lang="en-GB" dirty="0"/>
+          </a:p>
+        </p:txBody>
+      </p:sp>
+      <p:sp>
+        <p:nvSpPr>
+          <p:cNvPr id="4" name="Slide Number Placeholder 3"/>
+          <p:cNvSpPr>
+            <a:spLocks noGrp="1"/>
+          </p:cNvSpPr>
+          <p:nvPr>
+            <p:ph type="sldNum" sz="quarter" idx="5"/>
+          </p:nvPr>
+        </p:nvSpPr>
+        <p:spPr/>
+        <p:txBody>
+          <a:bodyPr/>
+          <a:lstStyle/>
+          <a:p>
+            <a:fld id="{FD069BF9-EF94-48C3-9509-8AE0DD47CC15}" type="slidenum">
+              <a:rPr lang="en-IE" smtClean="0"/>
+              <a:t>31</a:t>
+            </a:fld>
+            <a:endParaRPr lang="en-IE"/>
+          </a:p>
+        </p:txBody>
+      </p:sp>
+    </p:spTree>
+    <p:extLst>
+      <p:ext uri="{BB962C8B-B14F-4D97-AF65-F5344CB8AC3E}">
+        <p14:creationId xmlns:p14="http://schemas.microsoft.com/office/powerpoint/2010/main" val="2994536877"/>
+      </p:ext>
+    </p:extLst>
+  </p:cSld>
+  <p:clrMapOvr>
+    <a:masterClrMapping/>
+  </p:clrMapOvr>
+</p:notes>
+</file>
+
 <file path=ppt/notesSlides/notesSlide2.xml><?xml version="1.0" encoding="utf-8"?>
 <p:notes xmlns:a="http://schemas.openxmlformats.org/drawingml/2006/main" xmlns:r="http://schemas.openxmlformats.org/officeDocument/2006/relationships" xmlns:p="http://schemas.openxmlformats.org/presentationml/2006/main">
   <p:cSld>
@@ -28495,7 +29009,7 @@
       </p:sp>
       <mc:AlternateContent xmlns:mc="http://schemas.openxmlformats.org/markup-compatibility/2006" xmlns:p14="http://schemas.microsoft.com/office/powerpoint/2010/main">
         <mc:Choice Requires="p14">
-          <p:contentPart p14:bwMode="auto" r:id="rId2">
+          <p:contentPart p14:bwMode="auto" r:id="rId3">
             <p14:nvContentPartPr>
               <p14:cNvPr id="4" name="Ink 3">
                 <a:extLst>
@@ -28527,7 +29041,7 @@
               <p:nvPr/>
             </p:nvPicPr>
             <p:blipFill>
-              <a:blip r:embed="rId3"/>
+              <a:blip r:embed="rId4"/>
               <a:stretch>
                 <a:fillRect/>
               </a:stretch>
@@ -28566,7 +29080,7 @@
         </p:grpSpPr>
         <mc:AlternateContent xmlns:mc="http://schemas.openxmlformats.org/markup-compatibility/2006" xmlns:p14="http://schemas.microsoft.com/office/powerpoint/2010/main">
           <mc:Choice Requires="p14">
-            <p:contentPart p14:bwMode="auto" r:id="rId4">
+            <p:contentPart p14:bwMode="auto" r:id="rId5">
               <p14:nvContentPartPr>
                 <p14:cNvPr id="6" name="Ink 5">
                   <a:extLst>
@@ -28598,7 +29112,7 @@
                 <p:nvPr/>
               </p:nvPicPr>
               <p:blipFill>
-                <a:blip r:embed="rId5"/>
+                <a:blip r:embed="rId6"/>
                 <a:stretch>
                   <a:fillRect/>
                 </a:stretch>
@@ -28617,7 +29131,7 @@
         </mc:AlternateContent>
         <mc:AlternateContent xmlns:mc="http://schemas.openxmlformats.org/markup-compatibility/2006" xmlns:p14="http://schemas.microsoft.com/office/powerpoint/2010/main">
           <mc:Choice Requires="p14">
-            <p:contentPart p14:bwMode="auto" r:id="rId6">
+            <p:contentPart p14:bwMode="auto" r:id="rId7">
               <p14:nvContentPartPr>
                 <p14:cNvPr id="8" name="Ink 7">
                   <a:extLst>
@@ -28649,7 +29163,7 @@
                 <p:nvPr/>
               </p:nvPicPr>
               <p:blipFill>
-                <a:blip r:embed="rId7"/>
+                <a:blip r:embed="rId8"/>
                 <a:stretch>
                   <a:fillRect/>
                 </a:stretch>
@@ -28668,7 +29182,7 @@
         </mc:AlternateContent>
         <mc:AlternateContent xmlns:mc="http://schemas.openxmlformats.org/markup-compatibility/2006" xmlns:p14="http://schemas.microsoft.com/office/powerpoint/2010/main">
           <mc:Choice Requires="p14">
-            <p:contentPart p14:bwMode="auto" r:id="rId8">
+            <p:contentPart p14:bwMode="auto" r:id="rId9">
               <p14:nvContentPartPr>
                 <p14:cNvPr id="10" name="Ink 9">
                   <a:extLst>
@@ -28700,7 +29214,7 @@
                 <p:nvPr/>
               </p:nvPicPr>
               <p:blipFill>
-                <a:blip r:embed="rId9"/>
+                <a:blip r:embed="rId10"/>
                 <a:stretch>
                   <a:fillRect/>
                 </a:stretch>
@@ -28719,7 +29233,7 @@
         </mc:AlternateContent>
         <mc:AlternateContent xmlns:mc="http://schemas.openxmlformats.org/markup-compatibility/2006" xmlns:p14="http://schemas.microsoft.com/office/powerpoint/2010/main">
           <mc:Choice Requires="p14">
-            <p:contentPart p14:bwMode="auto" r:id="rId10">
+            <p:contentPart p14:bwMode="auto" r:id="rId11">
               <p14:nvContentPartPr>
                 <p14:cNvPr id="13" name="Ink 12">
                   <a:extLst>
@@ -28751,7 +29265,7 @@
                 <p:nvPr/>
               </p:nvPicPr>
               <p:blipFill>
-                <a:blip r:embed="rId11"/>
+                <a:blip r:embed="rId12"/>
                 <a:stretch>
                   <a:fillRect/>
                 </a:stretch>
@@ -28771,7 +29285,7 @@
       </p:grpSp>
       <mc:AlternateContent xmlns:mc="http://schemas.openxmlformats.org/markup-compatibility/2006" xmlns:p14="http://schemas.microsoft.com/office/powerpoint/2010/main">
         <mc:Choice Requires="p14">
-          <p:contentPart p14:bwMode="auto" r:id="rId12">
+          <p:contentPart p14:bwMode="auto" r:id="rId13">
             <p14:nvContentPartPr>
               <p14:cNvPr id="17" name="Ink 16">
                 <a:extLst>
@@ -28803,7 +29317,7 @@
               <p:nvPr/>
             </p:nvPicPr>
             <p:blipFill>
-              <a:blip r:embed="rId13"/>
+              <a:blip r:embed="rId14"/>
               <a:stretch>
                 <a:fillRect/>
               </a:stretch>
@@ -28822,7 +29336,7 @@
       </mc:AlternateContent>
       <mc:AlternateContent xmlns:mc="http://schemas.openxmlformats.org/markup-compatibility/2006" xmlns:p14="http://schemas.microsoft.com/office/powerpoint/2010/main">
         <mc:Choice Requires="p14">
-          <p:contentPart p14:bwMode="auto" r:id="rId14">
+          <p:contentPart p14:bwMode="auto" r:id="rId15">
             <p14:nvContentPartPr>
               <p14:cNvPr id="18" name="Ink 17">
                 <a:extLst>
@@ -28854,7 +29368,7 @@
               <p:nvPr/>
             </p:nvPicPr>
             <p:blipFill>
-              <a:blip r:embed="rId15"/>
+              <a:blip r:embed="rId16"/>
               <a:stretch>
                 <a:fillRect/>
               </a:stretch>
@@ -28873,7 +29387,7 @@
       </mc:AlternateContent>
       <mc:AlternateContent xmlns:mc="http://schemas.openxmlformats.org/markup-compatibility/2006" xmlns:p14="http://schemas.microsoft.com/office/powerpoint/2010/main">
         <mc:Choice Requires="p14">
-          <p:contentPart p14:bwMode="auto" r:id="rId16">
+          <p:contentPart p14:bwMode="auto" r:id="rId17">
             <p14:nvContentPartPr>
               <p14:cNvPr id="19" name="Ink 18">
                 <a:extLst>
@@ -28905,7 +29419,7 @@
               <p:nvPr/>
             </p:nvPicPr>
             <p:blipFill>
-              <a:blip r:embed="rId17"/>
+              <a:blip r:embed="rId18"/>
               <a:stretch>
                 <a:fillRect/>
               </a:stretch>
@@ -28924,7 +29438,7 @@
       </mc:AlternateContent>
       <mc:AlternateContent xmlns:mc="http://schemas.openxmlformats.org/markup-compatibility/2006" xmlns:p14="http://schemas.microsoft.com/office/powerpoint/2010/main">
         <mc:Choice Requires="p14">
-          <p:contentPart p14:bwMode="auto" r:id="rId18">
+          <p:contentPart p14:bwMode="auto" r:id="rId19">
             <p14:nvContentPartPr>
               <p14:cNvPr id="20" name="Ink 19">
                 <a:extLst>
@@ -28956,7 +29470,7 @@
               <p:nvPr/>
             </p:nvPicPr>
             <p:blipFill>
-              <a:blip r:embed="rId19"/>
+              <a:blip r:embed="rId20"/>
               <a:stretch>
                 <a:fillRect/>
               </a:stretch>
@@ -28975,7 +29489,7 @@
       </mc:AlternateContent>
       <mc:AlternateContent xmlns:mc="http://schemas.openxmlformats.org/markup-compatibility/2006" xmlns:p14="http://schemas.microsoft.com/office/powerpoint/2010/main">
         <mc:Choice Requires="p14">
-          <p:contentPart p14:bwMode="auto" r:id="rId20">
+          <p:contentPart p14:bwMode="auto" r:id="rId21">
             <p14:nvContentPartPr>
               <p14:cNvPr id="21" name="Ink 20">
                 <a:extLst>
@@ -29007,7 +29521,7 @@
               <p:nvPr/>
             </p:nvPicPr>
             <p:blipFill>
-              <a:blip r:embed="rId21"/>
+              <a:blip r:embed="rId22"/>
               <a:stretch>
                 <a:fillRect/>
               </a:stretch>
@@ -29046,7 +29560,7 @@
         </p:grpSpPr>
         <mc:AlternateContent xmlns:mc="http://schemas.openxmlformats.org/markup-compatibility/2006" xmlns:p14="http://schemas.microsoft.com/office/powerpoint/2010/main">
           <mc:Choice Requires="p14">
-            <p:contentPart p14:bwMode="auto" r:id="rId22">
+            <p:contentPart p14:bwMode="auto" r:id="rId23">
               <p14:nvContentPartPr>
                 <p14:cNvPr id="55" name="Ink 54">
                   <a:extLst>
@@ -29078,7 +29592,7 @@
                 <p:nvPr/>
               </p:nvPicPr>
               <p:blipFill>
-                <a:blip r:embed="rId23"/>
+                <a:blip r:embed="rId24"/>
                 <a:stretch>
                   <a:fillRect/>
                 </a:stretch>
@@ -29097,7 +29611,7 @@
         </mc:AlternateContent>
         <mc:AlternateContent xmlns:mc="http://schemas.openxmlformats.org/markup-compatibility/2006" xmlns:p14="http://schemas.microsoft.com/office/powerpoint/2010/main">
           <mc:Choice Requires="p14">
-            <p:contentPart p14:bwMode="auto" r:id="rId24">
+            <p:contentPart p14:bwMode="auto" r:id="rId25">
               <p14:nvContentPartPr>
                 <p14:cNvPr id="58" name="Ink 57">
                   <a:extLst>
@@ -29129,7 +29643,7 @@
                 <p:nvPr/>
               </p:nvPicPr>
               <p:blipFill>
-                <a:blip r:embed="rId25"/>
+                <a:blip r:embed="rId26"/>
                 <a:stretch>
                   <a:fillRect/>
                 </a:stretch>
@@ -29169,7 +29683,7 @@
         </p:grpSpPr>
         <mc:AlternateContent xmlns:mc="http://schemas.openxmlformats.org/markup-compatibility/2006" xmlns:p14="http://schemas.microsoft.com/office/powerpoint/2010/main">
           <mc:Choice Requires="p14">
-            <p:contentPart p14:bwMode="auto" r:id="rId26">
+            <p:contentPart p14:bwMode="auto" r:id="rId27">
               <p14:nvContentPartPr>
                 <p14:cNvPr id="61" name="Ink 60">
                   <a:extLst>
@@ -29201,7 +29715,7 @@
                 <p:nvPr/>
               </p:nvPicPr>
               <p:blipFill>
-                <a:blip r:embed="rId27"/>
+                <a:blip r:embed="rId28"/>
                 <a:stretch>
                   <a:fillRect/>
                 </a:stretch>
@@ -29220,7 +29734,7 @@
         </mc:AlternateContent>
         <mc:AlternateContent xmlns:mc="http://schemas.openxmlformats.org/markup-compatibility/2006" xmlns:p14="http://schemas.microsoft.com/office/powerpoint/2010/main">
           <mc:Choice Requires="p14">
-            <p:contentPart p14:bwMode="auto" r:id="rId28">
+            <p:contentPart p14:bwMode="auto" r:id="rId29">
               <p14:nvContentPartPr>
                 <p14:cNvPr id="62" name="Ink 61">
                   <a:extLst>
@@ -29252,7 +29766,7 @@
                 <p:nvPr/>
               </p:nvPicPr>
               <p:blipFill>
-                <a:blip r:embed="rId29"/>
+                <a:blip r:embed="rId30"/>
                 <a:stretch>
                   <a:fillRect/>
                 </a:stretch>
@@ -29271,7 +29785,7 @@
         </mc:AlternateContent>
         <mc:AlternateContent xmlns:mc="http://schemas.openxmlformats.org/markup-compatibility/2006" xmlns:p14="http://schemas.microsoft.com/office/powerpoint/2010/main">
           <mc:Choice Requires="p14">
-            <p:contentPart p14:bwMode="auto" r:id="rId30">
+            <p:contentPart p14:bwMode="auto" r:id="rId31">
               <p14:nvContentPartPr>
                 <p14:cNvPr id="63" name="Ink 62">
                   <a:extLst>
@@ -29303,7 +29817,7 @@
                 <p:nvPr/>
               </p:nvPicPr>
               <p:blipFill>
-                <a:blip r:embed="rId31"/>
+                <a:blip r:embed="rId32"/>
                 <a:stretch>
                   <a:fillRect/>
                 </a:stretch>
@@ -29322,7 +29836,7 @@
         </mc:AlternateContent>
         <mc:AlternateContent xmlns:mc="http://schemas.openxmlformats.org/markup-compatibility/2006" xmlns:p14="http://schemas.microsoft.com/office/powerpoint/2010/main">
           <mc:Choice Requires="p14">
-            <p:contentPart p14:bwMode="auto" r:id="rId32">
+            <p:contentPart p14:bwMode="auto" r:id="rId33">
               <p14:nvContentPartPr>
                 <p14:cNvPr id="64" name="Ink 63">
                   <a:extLst>
@@ -29354,7 +29868,7 @@
                 <p:nvPr/>
               </p:nvPicPr>
               <p:blipFill>
-                <a:blip r:embed="rId33"/>
+                <a:blip r:embed="rId34"/>
                 <a:stretch>
                   <a:fillRect/>
                 </a:stretch>
@@ -29373,7 +29887,7 @@
         </mc:AlternateContent>
         <mc:AlternateContent xmlns:mc="http://schemas.openxmlformats.org/markup-compatibility/2006" xmlns:p14="http://schemas.microsoft.com/office/powerpoint/2010/main">
           <mc:Choice Requires="p14">
-            <p:contentPart p14:bwMode="auto" r:id="rId34">
+            <p:contentPart p14:bwMode="auto" r:id="rId35">
               <p14:nvContentPartPr>
                 <p14:cNvPr id="65" name="Ink 64">
                   <a:extLst>
@@ -29405,7 +29919,7 @@
                 <p:nvPr/>
               </p:nvPicPr>
               <p:blipFill>
-                <a:blip r:embed="rId35"/>
+                <a:blip r:embed="rId36"/>
                 <a:stretch>
                   <a:fillRect/>
                 </a:stretch>
@@ -29424,7 +29938,7 @@
         </mc:AlternateContent>
         <mc:AlternateContent xmlns:mc="http://schemas.openxmlformats.org/markup-compatibility/2006" xmlns:p14="http://schemas.microsoft.com/office/powerpoint/2010/main">
           <mc:Choice Requires="p14">
-            <p:contentPart p14:bwMode="auto" r:id="rId36">
+            <p:contentPart p14:bwMode="auto" r:id="rId37">
               <p14:nvContentPartPr>
                 <p14:cNvPr id="66" name="Ink 65">
                   <a:extLst>
@@ -29456,7 +29970,7 @@
                 <p:nvPr/>
               </p:nvPicPr>
               <p:blipFill>
-                <a:blip r:embed="rId37"/>
+                <a:blip r:embed="rId38"/>
                 <a:stretch>
                   <a:fillRect/>
                 </a:stretch>
@@ -29475,7 +29989,7 @@
         </mc:AlternateContent>
         <mc:AlternateContent xmlns:mc="http://schemas.openxmlformats.org/markup-compatibility/2006" xmlns:p14="http://schemas.microsoft.com/office/powerpoint/2010/main">
           <mc:Choice Requires="p14">
-            <p:contentPart p14:bwMode="auto" r:id="rId38">
+            <p:contentPart p14:bwMode="auto" r:id="rId39">
               <p14:nvContentPartPr>
                 <p14:cNvPr id="67" name="Ink 66">
                   <a:extLst>
@@ -29507,7 +30021,7 @@
                 <p:nvPr/>
               </p:nvPicPr>
               <p:blipFill>
-                <a:blip r:embed="rId39"/>
+                <a:blip r:embed="rId40"/>
                 <a:stretch>
                   <a:fillRect/>
                 </a:stretch>
@@ -29526,7 +30040,7 @@
         </mc:AlternateContent>
         <mc:AlternateContent xmlns:mc="http://schemas.openxmlformats.org/markup-compatibility/2006" xmlns:p14="http://schemas.microsoft.com/office/powerpoint/2010/main">
           <mc:Choice Requires="p14">
-            <p:contentPart p14:bwMode="auto" r:id="rId40">
+            <p:contentPart p14:bwMode="auto" r:id="rId41">
               <p14:nvContentPartPr>
                 <p14:cNvPr id="68" name="Ink 67">
                   <a:extLst>
@@ -29558,7 +30072,7 @@
                 <p:nvPr/>
               </p:nvPicPr>
               <p:blipFill>
-                <a:blip r:embed="rId41"/>
+                <a:blip r:embed="rId42"/>
                 <a:stretch>
                   <a:fillRect/>
                 </a:stretch>
@@ -29577,7 +30091,7 @@
         </mc:AlternateContent>
         <mc:AlternateContent xmlns:mc="http://schemas.openxmlformats.org/markup-compatibility/2006" xmlns:p14="http://schemas.microsoft.com/office/powerpoint/2010/main">
           <mc:Choice Requires="p14">
-            <p:contentPart p14:bwMode="auto" r:id="rId42">
+            <p:contentPart p14:bwMode="auto" r:id="rId43">
               <p14:nvContentPartPr>
                 <p14:cNvPr id="70" name="Ink 69">
                   <a:extLst>
@@ -29609,7 +30123,7 @@
                 <p:nvPr/>
               </p:nvPicPr>
               <p:blipFill>
-                <a:blip r:embed="rId43"/>
+                <a:blip r:embed="rId44"/>
                 <a:stretch>
                   <a:fillRect/>
                 </a:stretch>
@@ -29628,7 +30142,7 @@
         </mc:AlternateContent>
         <mc:AlternateContent xmlns:mc="http://schemas.openxmlformats.org/markup-compatibility/2006" xmlns:p14="http://schemas.microsoft.com/office/powerpoint/2010/main">
           <mc:Choice Requires="p14">
-            <p:contentPart p14:bwMode="auto" r:id="rId44">
+            <p:contentPart p14:bwMode="auto" r:id="rId45">
               <p14:nvContentPartPr>
                 <p14:cNvPr id="71" name="Ink 70">
                   <a:extLst>
@@ -29660,7 +30174,7 @@
                 <p:nvPr/>
               </p:nvPicPr>
               <p:blipFill>
-                <a:blip r:embed="rId45"/>
+                <a:blip r:embed="rId46"/>
                 <a:stretch>
                   <a:fillRect/>
                 </a:stretch>
@@ -29679,7 +30193,7 @@
         </mc:AlternateContent>
         <mc:AlternateContent xmlns:mc="http://schemas.openxmlformats.org/markup-compatibility/2006" xmlns:p14="http://schemas.microsoft.com/office/powerpoint/2010/main">
           <mc:Choice Requires="p14">
-            <p:contentPart p14:bwMode="auto" r:id="rId46">
+            <p:contentPart p14:bwMode="auto" r:id="rId47">
               <p14:nvContentPartPr>
                 <p14:cNvPr id="72" name="Ink 71">
                   <a:extLst>
@@ -29711,7 +30225,7 @@
                 <p:nvPr/>
               </p:nvPicPr>
               <p:blipFill>
-                <a:blip r:embed="rId47"/>
+                <a:blip r:embed="rId48"/>
                 <a:stretch>
                   <a:fillRect/>
                 </a:stretch>
@@ -29730,7 +30244,7 @@
         </mc:AlternateContent>
         <mc:AlternateContent xmlns:mc="http://schemas.openxmlformats.org/markup-compatibility/2006" xmlns:p14="http://schemas.microsoft.com/office/powerpoint/2010/main">
           <mc:Choice Requires="p14">
-            <p:contentPart p14:bwMode="auto" r:id="rId48">
+            <p:contentPart p14:bwMode="auto" r:id="rId49">
               <p14:nvContentPartPr>
                 <p14:cNvPr id="74" name="Ink 73">
                   <a:extLst>
@@ -29762,7 +30276,7 @@
                 <p:nvPr/>
               </p:nvPicPr>
               <p:blipFill>
-                <a:blip r:embed="rId49"/>
+                <a:blip r:embed="rId50"/>
                 <a:stretch>
                   <a:fillRect/>
                 </a:stretch>
@@ -29781,7 +30295,7 @@
         </mc:AlternateContent>
         <mc:AlternateContent xmlns:mc="http://schemas.openxmlformats.org/markup-compatibility/2006" xmlns:p14="http://schemas.microsoft.com/office/powerpoint/2010/main">
           <mc:Choice Requires="p14">
-            <p:contentPart p14:bwMode="auto" r:id="rId50">
+            <p:contentPart p14:bwMode="auto" r:id="rId51">
               <p14:nvContentPartPr>
                 <p14:cNvPr id="75" name="Ink 74">
                   <a:extLst>
@@ -29813,7 +30327,7 @@
                 <p:nvPr/>
               </p:nvPicPr>
               <p:blipFill>
-                <a:blip r:embed="rId51"/>
+                <a:blip r:embed="rId52"/>
                 <a:stretch>
                   <a:fillRect/>
                 </a:stretch>
@@ -29832,7 +30346,7 @@
         </mc:AlternateContent>
         <mc:AlternateContent xmlns:mc="http://schemas.openxmlformats.org/markup-compatibility/2006" xmlns:p14="http://schemas.microsoft.com/office/powerpoint/2010/main">
           <mc:Choice Requires="p14">
-            <p:contentPart p14:bwMode="auto" r:id="rId52">
+            <p:contentPart p14:bwMode="auto" r:id="rId53">
               <p14:nvContentPartPr>
                 <p14:cNvPr id="76" name="Ink 75">
                   <a:extLst>
@@ -29864,7 +30378,7 @@
                 <p:nvPr/>
               </p:nvPicPr>
               <p:blipFill>
-                <a:blip r:embed="rId53"/>
+                <a:blip r:embed="rId54"/>
                 <a:stretch>
                   <a:fillRect/>
                 </a:stretch>
@@ -29883,7 +30397,7 @@
         </mc:AlternateContent>
         <mc:AlternateContent xmlns:mc="http://schemas.openxmlformats.org/markup-compatibility/2006" xmlns:p14="http://schemas.microsoft.com/office/powerpoint/2010/main">
           <mc:Choice Requires="p14">
-            <p:contentPart p14:bwMode="auto" r:id="rId54">
+            <p:contentPart p14:bwMode="auto" r:id="rId55">
               <p14:nvContentPartPr>
                 <p14:cNvPr id="77" name="Ink 76">
                   <a:extLst>
@@ -29915,7 +30429,7 @@
                 <p:nvPr/>
               </p:nvPicPr>
               <p:blipFill>
-                <a:blip r:embed="rId55"/>
+                <a:blip r:embed="rId56"/>
                 <a:stretch>
                   <a:fillRect/>
                 </a:stretch>
@@ -29955,7 +30469,7 @@
         </p:grpSpPr>
         <mc:AlternateContent xmlns:mc="http://schemas.openxmlformats.org/markup-compatibility/2006" xmlns:p14="http://schemas.microsoft.com/office/powerpoint/2010/main">
           <mc:Choice Requires="p14">
-            <p:contentPart p14:bwMode="auto" r:id="rId56">
+            <p:contentPart p14:bwMode="auto" r:id="rId57">
               <p14:nvContentPartPr>
                 <p14:cNvPr id="79" name="Ink 78">
                   <a:extLst>
@@ -29987,7 +30501,7 @@
                 <p:nvPr/>
               </p:nvPicPr>
               <p:blipFill>
-                <a:blip r:embed="rId57"/>
+                <a:blip r:embed="rId58"/>
                 <a:stretch>
                   <a:fillRect/>
                 </a:stretch>
@@ -30006,7 +30520,7 @@
         </mc:AlternateContent>
         <mc:AlternateContent xmlns:mc="http://schemas.openxmlformats.org/markup-compatibility/2006" xmlns:p14="http://schemas.microsoft.com/office/powerpoint/2010/main">
           <mc:Choice Requires="p14">
-            <p:contentPart p14:bwMode="auto" r:id="rId58">
+            <p:contentPart p14:bwMode="auto" r:id="rId59">
               <p14:nvContentPartPr>
                 <p14:cNvPr id="80" name="Ink 79">
                   <a:extLst>
@@ -30038,7 +30552,7 @@
                 <p:nvPr/>
               </p:nvPicPr>
               <p:blipFill>
-                <a:blip r:embed="rId59"/>
+                <a:blip r:embed="rId60"/>
                 <a:stretch>
                   <a:fillRect/>
                 </a:stretch>
@@ -30057,7 +30571,7 @@
         </mc:AlternateContent>
         <mc:AlternateContent xmlns:mc="http://schemas.openxmlformats.org/markup-compatibility/2006" xmlns:p14="http://schemas.microsoft.com/office/powerpoint/2010/main">
           <mc:Choice Requires="p14">
-            <p:contentPart p14:bwMode="auto" r:id="rId60">
+            <p:contentPart p14:bwMode="auto" r:id="rId61">
               <p14:nvContentPartPr>
                 <p14:cNvPr id="81" name="Ink 80">
                   <a:extLst>
@@ -30089,7 +30603,7 @@
                 <p:nvPr/>
               </p:nvPicPr>
               <p:blipFill>
-                <a:blip r:embed="rId61"/>
+                <a:blip r:embed="rId62"/>
                 <a:stretch>
                   <a:fillRect/>
                 </a:stretch>
@@ -30108,7 +30622,7 @@
         </mc:AlternateContent>
         <mc:AlternateContent xmlns:mc="http://schemas.openxmlformats.org/markup-compatibility/2006" xmlns:p14="http://schemas.microsoft.com/office/powerpoint/2010/main">
           <mc:Choice Requires="p14">
-            <p:contentPart p14:bwMode="auto" r:id="rId62">
+            <p:contentPart p14:bwMode="auto" r:id="rId63">
               <p14:nvContentPartPr>
                 <p14:cNvPr id="82" name="Ink 81">
                   <a:extLst>
@@ -30140,7 +30654,7 @@
                 <p:nvPr/>
               </p:nvPicPr>
               <p:blipFill>
-                <a:blip r:embed="rId63"/>
+                <a:blip r:embed="rId64"/>
                 <a:stretch>
                   <a:fillRect/>
                 </a:stretch>
@@ -30159,7 +30673,7 @@
         </mc:AlternateContent>
         <mc:AlternateContent xmlns:mc="http://schemas.openxmlformats.org/markup-compatibility/2006" xmlns:p14="http://schemas.microsoft.com/office/powerpoint/2010/main">
           <mc:Choice Requires="p14">
-            <p:contentPart p14:bwMode="auto" r:id="rId64">
+            <p:contentPart p14:bwMode="auto" r:id="rId65">
               <p14:nvContentPartPr>
                 <p14:cNvPr id="83" name="Ink 82">
                   <a:extLst>
@@ -30191,7 +30705,7 @@
                 <p:nvPr/>
               </p:nvPicPr>
               <p:blipFill>
-                <a:blip r:embed="rId65"/>
+                <a:blip r:embed="rId66"/>
                 <a:stretch>
                   <a:fillRect/>
                 </a:stretch>
@@ -30210,7 +30724,7 @@
         </mc:AlternateContent>
         <mc:AlternateContent xmlns:mc="http://schemas.openxmlformats.org/markup-compatibility/2006" xmlns:p14="http://schemas.microsoft.com/office/powerpoint/2010/main">
           <mc:Choice Requires="p14">
-            <p:contentPart p14:bwMode="auto" r:id="rId66">
+            <p:contentPart p14:bwMode="auto" r:id="rId67">
               <p14:nvContentPartPr>
                 <p14:cNvPr id="84" name="Ink 83">
                   <a:extLst>
@@ -30242,7 +30756,7 @@
                 <p:nvPr/>
               </p:nvPicPr>
               <p:blipFill>
-                <a:blip r:embed="rId67"/>
+                <a:blip r:embed="rId68"/>
                 <a:stretch>
                   <a:fillRect/>
                 </a:stretch>
@@ -30261,7 +30775,7 @@
         </mc:AlternateContent>
         <mc:AlternateContent xmlns:mc="http://schemas.openxmlformats.org/markup-compatibility/2006" xmlns:p14="http://schemas.microsoft.com/office/powerpoint/2010/main">
           <mc:Choice Requires="p14">
-            <p:contentPart p14:bwMode="auto" r:id="rId68">
+            <p:contentPart p14:bwMode="auto" r:id="rId69">
               <p14:nvContentPartPr>
                 <p14:cNvPr id="85" name="Ink 84">
                   <a:extLst>
@@ -30293,7 +30807,7 @@
                 <p:nvPr/>
               </p:nvPicPr>
               <p:blipFill>
-                <a:blip r:embed="rId69"/>
+                <a:blip r:embed="rId70"/>
                 <a:stretch>
                   <a:fillRect/>
                 </a:stretch>
@@ -30312,7 +30826,7 @@
         </mc:AlternateContent>
         <mc:AlternateContent xmlns:mc="http://schemas.openxmlformats.org/markup-compatibility/2006" xmlns:p14="http://schemas.microsoft.com/office/powerpoint/2010/main">
           <mc:Choice Requires="p14">
-            <p:contentPart p14:bwMode="auto" r:id="rId70">
+            <p:contentPart p14:bwMode="auto" r:id="rId71">
               <p14:nvContentPartPr>
                 <p14:cNvPr id="86" name="Ink 85">
                   <a:extLst>
@@ -30344,7 +30858,7 @@
                 <p:nvPr/>
               </p:nvPicPr>
               <p:blipFill>
-                <a:blip r:embed="rId45"/>
+                <a:blip r:embed="rId46"/>
                 <a:stretch>
                   <a:fillRect/>
                 </a:stretch>
@@ -30363,7 +30877,7 @@
         </mc:AlternateContent>
         <mc:AlternateContent xmlns:mc="http://schemas.openxmlformats.org/markup-compatibility/2006" xmlns:p14="http://schemas.microsoft.com/office/powerpoint/2010/main">
           <mc:Choice Requires="p14">
-            <p:contentPart p14:bwMode="auto" r:id="rId71">
+            <p:contentPart p14:bwMode="auto" r:id="rId72">
               <p14:nvContentPartPr>
                 <p14:cNvPr id="88" name="Ink 87">
                   <a:extLst>
@@ -30395,7 +30909,7 @@
                 <p:nvPr/>
               </p:nvPicPr>
               <p:blipFill>
-                <a:blip r:embed="rId72"/>
+                <a:blip r:embed="rId73"/>
                 <a:stretch>
                   <a:fillRect/>
                 </a:stretch>
@@ -30414,7 +30928,7 @@
         </mc:AlternateContent>
         <mc:AlternateContent xmlns:mc="http://schemas.openxmlformats.org/markup-compatibility/2006" xmlns:p14="http://schemas.microsoft.com/office/powerpoint/2010/main">
           <mc:Choice Requires="p14">
-            <p:contentPart p14:bwMode="auto" r:id="rId73">
+            <p:contentPart p14:bwMode="auto" r:id="rId74">
               <p14:nvContentPartPr>
                 <p14:cNvPr id="89" name="Ink 88">
                   <a:extLst>
@@ -30446,7 +30960,7 @@
                 <p:nvPr/>
               </p:nvPicPr>
               <p:blipFill>
-                <a:blip r:embed="rId74"/>
+                <a:blip r:embed="rId75"/>
                 <a:stretch>
                   <a:fillRect/>
                 </a:stretch>
@@ -30465,7 +30979,7 @@
         </mc:AlternateContent>
         <mc:AlternateContent xmlns:mc="http://schemas.openxmlformats.org/markup-compatibility/2006" xmlns:p14="http://schemas.microsoft.com/office/powerpoint/2010/main">
           <mc:Choice Requires="p14">
-            <p:contentPart p14:bwMode="auto" r:id="rId75">
+            <p:contentPart p14:bwMode="auto" r:id="rId76">
               <p14:nvContentPartPr>
                 <p14:cNvPr id="90" name="Ink 89">
                   <a:extLst>
@@ -30497,7 +31011,7 @@
                 <p:nvPr/>
               </p:nvPicPr>
               <p:blipFill>
-                <a:blip r:embed="rId76"/>
+                <a:blip r:embed="rId77"/>
                 <a:stretch>
                   <a:fillRect/>
                 </a:stretch>
@@ -30516,7 +31030,7 @@
         </mc:AlternateContent>
         <mc:AlternateContent xmlns:mc="http://schemas.openxmlformats.org/markup-compatibility/2006" xmlns:p14="http://schemas.microsoft.com/office/powerpoint/2010/main">
           <mc:Choice Requires="p14">
-            <p:contentPart p14:bwMode="auto" r:id="rId77">
+            <p:contentPart p14:bwMode="auto" r:id="rId78">
               <p14:nvContentPartPr>
                 <p14:cNvPr id="91" name="Ink 90">
                   <a:extLst>
@@ -30548,7 +31062,7 @@
                 <p:nvPr/>
               </p:nvPicPr>
               <p:blipFill>
-                <a:blip r:embed="rId78"/>
+                <a:blip r:embed="rId79"/>
                 <a:stretch>
                   <a:fillRect/>
                 </a:stretch>
@@ -30567,7 +31081,7 @@
         </mc:AlternateContent>
         <mc:AlternateContent xmlns:mc="http://schemas.openxmlformats.org/markup-compatibility/2006" xmlns:p14="http://schemas.microsoft.com/office/powerpoint/2010/main">
           <mc:Choice Requires="p14">
-            <p:contentPart p14:bwMode="auto" r:id="rId79">
+            <p:contentPart p14:bwMode="auto" r:id="rId80">
               <p14:nvContentPartPr>
                 <p14:cNvPr id="92" name="Ink 91">
                   <a:extLst>
@@ -30599,7 +31113,7 @@
                 <p:nvPr/>
               </p:nvPicPr>
               <p:blipFill>
-                <a:blip r:embed="rId80"/>
+                <a:blip r:embed="rId81"/>
                 <a:stretch>
                   <a:fillRect/>
                 </a:stretch>
@@ -30618,7 +31132,7 @@
         </mc:AlternateContent>
         <mc:AlternateContent xmlns:mc="http://schemas.openxmlformats.org/markup-compatibility/2006" xmlns:p14="http://schemas.microsoft.com/office/powerpoint/2010/main">
           <mc:Choice Requires="p14">
-            <p:contentPart p14:bwMode="auto" r:id="rId81">
+            <p:contentPart p14:bwMode="auto" r:id="rId82">
               <p14:nvContentPartPr>
                 <p14:cNvPr id="93" name="Ink 92">
                   <a:extLst>
@@ -30650,7 +31164,7 @@
                 <p:nvPr/>
               </p:nvPicPr>
               <p:blipFill>
-                <a:blip r:embed="rId82"/>
+                <a:blip r:embed="rId83"/>
                 <a:stretch>
                   <a:fillRect/>
                 </a:stretch>
@@ -30669,7 +31183,7 @@
         </mc:AlternateContent>
         <mc:AlternateContent xmlns:mc="http://schemas.openxmlformats.org/markup-compatibility/2006" xmlns:p14="http://schemas.microsoft.com/office/powerpoint/2010/main">
           <mc:Choice Requires="p14">
-            <p:contentPart p14:bwMode="auto" r:id="rId83">
+            <p:contentPart p14:bwMode="auto" r:id="rId84">
               <p14:nvContentPartPr>
                 <p14:cNvPr id="94" name="Ink 93">
                   <a:extLst>
@@ -30701,7 +31215,7 @@
                 <p:nvPr/>
               </p:nvPicPr>
               <p:blipFill>
-                <a:blip r:embed="rId84"/>
+                <a:blip r:embed="rId85"/>
                 <a:stretch>
                   <a:fillRect/>
                 </a:stretch>
@@ -30741,7 +31255,7 @@
         </p:grpSpPr>
         <mc:AlternateContent xmlns:mc="http://schemas.openxmlformats.org/markup-compatibility/2006" xmlns:p14="http://schemas.microsoft.com/office/powerpoint/2010/main">
           <mc:Choice Requires="p14">
-            <p:contentPart p14:bwMode="auto" r:id="rId85">
+            <p:contentPart p14:bwMode="auto" r:id="rId86">
               <p14:nvContentPartPr>
                 <p14:cNvPr id="96" name="Ink 95">
                   <a:extLst>
@@ -30773,7 +31287,7 @@
                 <p:nvPr/>
               </p:nvPicPr>
               <p:blipFill>
-                <a:blip r:embed="rId86"/>
+                <a:blip r:embed="rId87"/>
                 <a:stretch>
                   <a:fillRect/>
                 </a:stretch>
@@ -30792,7 +31306,7 @@
         </mc:AlternateContent>
         <mc:AlternateContent xmlns:mc="http://schemas.openxmlformats.org/markup-compatibility/2006" xmlns:p14="http://schemas.microsoft.com/office/powerpoint/2010/main">
           <mc:Choice Requires="p14">
-            <p:contentPart p14:bwMode="auto" r:id="rId87">
+            <p:contentPart p14:bwMode="auto" r:id="rId88">
               <p14:nvContentPartPr>
                 <p14:cNvPr id="97" name="Ink 96">
                   <a:extLst>
@@ -30824,7 +31338,7 @@
                 <p:nvPr/>
               </p:nvPicPr>
               <p:blipFill>
-                <a:blip r:embed="rId88"/>
+                <a:blip r:embed="rId89"/>
                 <a:stretch>
                   <a:fillRect/>
                 </a:stretch>
@@ -30843,7 +31357,7 @@
         </mc:AlternateContent>
         <mc:AlternateContent xmlns:mc="http://schemas.openxmlformats.org/markup-compatibility/2006" xmlns:p14="http://schemas.microsoft.com/office/powerpoint/2010/main">
           <mc:Choice Requires="p14">
-            <p:contentPart p14:bwMode="auto" r:id="rId89">
+            <p:contentPart p14:bwMode="auto" r:id="rId90">
               <p14:nvContentPartPr>
                 <p14:cNvPr id="98" name="Ink 97">
                   <a:extLst>
@@ -30875,7 +31389,7 @@
                 <p:nvPr/>
               </p:nvPicPr>
               <p:blipFill>
-                <a:blip r:embed="rId90"/>
+                <a:blip r:embed="rId91"/>
                 <a:stretch>
                   <a:fillRect/>
                 </a:stretch>
@@ -30894,7 +31408,7 @@
         </mc:AlternateContent>
         <mc:AlternateContent xmlns:mc="http://schemas.openxmlformats.org/markup-compatibility/2006" xmlns:p14="http://schemas.microsoft.com/office/powerpoint/2010/main">
           <mc:Choice Requires="p14">
-            <p:contentPart p14:bwMode="auto" r:id="rId91">
+            <p:contentPart p14:bwMode="auto" r:id="rId92">
               <p14:nvContentPartPr>
                 <p14:cNvPr id="99" name="Ink 98">
                   <a:extLst>
@@ -30926,7 +31440,7 @@
                 <p:nvPr/>
               </p:nvPicPr>
               <p:blipFill>
-                <a:blip r:embed="rId45"/>
+                <a:blip r:embed="rId46"/>
                 <a:stretch>
                   <a:fillRect/>
                 </a:stretch>
@@ -30945,7 +31459,7 @@
         </mc:AlternateContent>
         <mc:AlternateContent xmlns:mc="http://schemas.openxmlformats.org/markup-compatibility/2006" xmlns:p14="http://schemas.microsoft.com/office/powerpoint/2010/main">
           <mc:Choice Requires="p14">
-            <p:contentPart p14:bwMode="auto" r:id="rId92">
+            <p:contentPart p14:bwMode="auto" r:id="rId93">
               <p14:nvContentPartPr>
                 <p14:cNvPr id="100" name="Ink 99">
                   <a:extLst>
@@ -30977,7 +31491,7 @@
                 <p:nvPr/>
               </p:nvPicPr>
               <p:blipFill>
-                <a:blip r:embed="rId93"/>
+                <a:blip r:embed="rId94"/>
                 <a:stretch>
                   <a:fillRect/>
                 </a:stretch>
@@ -30996,7 +31510,7 @@
         </mc:AlternateContent>
         <mc:AlternateContent xmlns:mc="http://schemas.openxmlformats.org/markup-compatibility/2006" xmlns:p14="http://schemas.microsoft.com/office/powerpoint/2010/main">
           <mc:Choice Requires="p14">
-            <p:contentPart p14:bwMode="auto" r:id="rId94">
+            <p:contentPart p14:bwMode="auto" r:id="rId95">
               <p14:nvContentPartPr>
                 <p14:cNvPr id="101" name="Ink 100">
                   <a:extLst>
@@ -31028,7 +31542,7 @@
                 <p:nvPr/>
               </p:nvPicPr>
               <p:blipFill>
-                <a:blip r:embed="rId95"/>
+                <a:blip r:embed="rId96"/>
                 <a:stretch>
                   <a:fillRect/>
                 </a:stretch>
@@ -31047,7 +31561,7 @@
         </mc:AlternateContent>
         <mc:AlternateContent xmlns:mc="http://schemas.openxmlformats.org/markup-compatibility/2006" xmlns:p14="http://schemas.microsoft.com/office/powerpoint/2010/main">
           <mc:Choice Requires="p14">
-            <p:contentPart p14:bwMode="auto" r:id="rId96">
+            <p:contentPart p14:bwMode="auto" r:id="rId97">
               <p14:nvContentPartPr>
                 <p14:cNvPr id="102" name="Ink 101">
                   <a:extLst>
@@ -31079,7 +31593,7 @@
                 <p:nvPr/>
               </p:nvPicPr>
               <p:blipFill>
-                <a:blip r:embed="rId97"/>
+                <a:blip r:embed="rId98"/>
                 <a:stretch>
                   <a:fillRect/>
                 </a:stretch>
@@ -31098,7 +31612,7 @@
         </mc:AlternateContent>
         <mc:AlternateContent xmlns:mc="http://schemas.openxmlformats.org/markup-compatibility/2006" xmlns:p14="http://schemas.microsoft.com/office/powerpoint/2010/main">
           <mc:Choice Requires="p14">
-            <p:contentPart p14:bwMode="auto" r:id="rId98">
+            <p:contentPart p14:bwMode="auto" r:id="rId99">
               <p14:nvContentPartPr>
                 <p14:cNvPr id="103" name="Ink 102">
                   <a:extLst>
@@ -31130,7 +31644,7 @@
                 <p:nvPr/>
               </p:nvPicPr>
               <p:blipFill>
-                <a:blip r:embed="rId99"/>
+                <a:blip r:embed="rId100"/>
                 <a:stretch>
                   <a:fillRect/>
                 </a:stretch>
@@ -31149,7 +31663,7 @@
         </mc:AlternateContent>
         <mc:AlternateContent xmlns:mc="http://schemas.openxmlformats.org/markup-compatibility/2006" xmlns:p14="http://schemas.microsoft.com/office/powerpoint/2010/main">
           <mc:Choice Requires="p14">
-            <p:contentPart p14:bwMode="auto" r:id="rId100">
+            <p:contentPart p14:bwMode="auto" r:id="rId101">
               <p14:nvContentPartPr>
                 <p14:cNvPr id="104" name="Ink 103">
                   <a:extLst>
@@ -31181,7 +31695,7 @@
                 <p:nvPr/>
               </p:nvPicPr>
               <p:blipFill>
-                <a:blip r:embed="rId101"/>
+                <a:blip r:embed="rId102"/>
                 <a:stretch>
                   <a:fillRect/>
                 </a:stretch>
@@ -31200,7 +31714,7 @@
         </mc:AlternateContent>
         <mc:AlternateContent xmlns:mc="http://schemas.openxmlformats.org/markup-compatibility/2006" xmlns:p14="http://schemas.microsoft.com/office/powerpoint/2010/main">
           <mc:Choice Requires="p14">
-            <p:contentPart p14:bwMode="auto" r:id="rId102">
+            <p:contentPart p14:bwMode="auto" r:id="rId103">
               <p14:nvContentPartPr>
                 <p14:cNvPr id="105" name="Ink 104">
                   <a:extLst>
@@ -31232,7 +31746,7 @@
                 <p:nvPr/>
               </p:nvPicPr>
               <p:blipFill>
-                <a:blip r:embed="rId45"/>
+                <a:blip r:embed="rId46"/>
                 <a:stretch>
                   <a:fillRect/>
                 </a:stretch>
@@ -31251,7 +31765,7 @@
         </mc:AlternateContent>
         <mc:AlternateContent xmlns:mc="http://schemas.openxmlformats.org/markup-compatibility/2006" xmlns:p14="http://schemas.microsoft.com/office/powerpoint/2010/main">
           <mc:Choice Requires="p14">
-            <p:contentPart p14:bwMode="auto" r:id="rId103">
+            <p:contentPart p14:bwMode="auto" r:id="rId104">
               <p14:nvContentPartPr>
                 <p14:cNvPr id="106" name="Ink 105">
                   <a:extLst>
@@ -31283,7 +31797,7 @@
                 <p:nvPr/>
               </p:nvPicPr>
               <p:blipFill>
-                <a:blip r:embed="rId104"/>
+                <a:blip r:embed="rId105"/>
                 <a:stretch>
                   <a:fillRect/>
                 </a:stretch>
@@ -31302,7 +31816,7 @@
         </mc:AlternateContent>
         <mc:AlternateContent xmlns:mc="http://schemas.openxmlformats.org/markup-compatibility/2006" xmlns:p14="http://schemas.microsoft.com/office/powerpoint/2010/main">
           <mc:Choice Requires="p14">
-            <p:contentPart p14:bwMode="auto" r:id="rId105">
+            <p:contentPart p14:bwMode="auto" r:id="rId106">
               <p14:nvContentPartPr>
                 <p14:cNvPr id="107" name="Ink 106">
                   <a:extLst>
@@ -31334,7 +31848,7 @@
                 <p:nvPr/>
               </p:nvPicPr>
               <p:blipFill>
-                <a:blip r:embed="rId106"/>
+                <a:blip r:embed="rId107"/>
                 <a:stretch>
                   <a:fillRect/>
                 </a:stretch>
@@ -31353,7 +31867,7 @@
         </mc:AlternateContent>
         <mc:AlternateContent xmlns:mc="http://schemas.openxmlformats.org/markup-compatibility/2006" xmlns:p14="http://schemas.microsoft.com/office/powerpoint/2010/main">
           <mc:Choice Requires="p14">
-            <p:contentPart p14:bwMode="auto" r:id="rId107">
+            <p:contentPart p14:bwMode="auto" r:id="rId108">
               <p14:nvContentPartPr>
                 <p14:cNvPr id="108" name="Ink 107">
                   <a:extLst>
@@ -31385,7 +31899,7 @@
                 <p:nvPr/>
               </p:nvPicPr>
               <p:blipFill>
-                <a:blip r:embed="rId108"/>
+                <a:blip r:embed="rId109"/>
                 <a:stretch>
                   <a:fillRect/>
                 </a:stretch>
@@ -31404,7 +31918,7 @@
         </mc:AlternateContent>
         <mc:AlternateContent xmlns:mc="http://schemas.openxmlformats.org/markup-compatibility/2006" xmlns:p14="http://schemas.microsoft.com/office/powerpoint/2010/main">
           <mc:Choice Requires="p14">
-            <p:contentPart p14:bwMode="auto" r:id="rId109">
+            <p:contentPart p14:bwMode="auto" r:id="rId110">
               <p14:nvContentPartPr>
                 <p14:cNvPr id="109" name="Ink 108">
                   <a:extLst>
@@ -31436,7 +31950,7 @@
                 <p:nvPr/>
               </p:nvPicPr>
               <p:blipFill>
-                <a:blip r:embed="rId110"/>
+                <a:blip r:embed="rId111"/>
                 <a:stretch>
                   <a:fillRect/>
                 </a:stretch>
@@ -31455,7 +31969,7 @@
         </mc:AlternateContent>
         <mc:AlternateContent xmlns:mc="http://schemas.openxmlformats.org/markup-compatibility/2006" xmlns:p14="http://schemas.microsoft.com/office/powerpoint/2010/main">
           <mc:Choice Requires="p14">
-            <p:contentPart p14:bwMode="auto" r:id="rId111">
+            <p:contentPart p14:bwMode="auto" r:id="rId112">
               <p14:nvContentPartPr>
                 <p14:cNvPr id="110" name="Ink 109">
                   <a:extLst>
@@ -31487,7 +32001,7 @@
                 <p:nvPr/>
               </p:nvPicPr>
               <p:blipFill>
-                <a:blip r:embed="rId112"/>
+                <a:blip r:embed="rId113"/>
                 <a:stretch>
                   <a:fillRect/>
                 </a:stretch>
@@ -31506,7 +32020,7 @@
         </mc:AlternateContent>
         <mc:AlternateContent xmlns:mc="http://schemas.openxmlformats.org/markup-compatibility/2006" xmlns:p14="http://schemas.microsoft.com/office/powerpoint/2010/main">
           <mc:Choice Requires="p14">
-            <p:contentPart p14:bwMode="auto" r:id="rId113">
+            <p:contentPart p14:bwMode="auto" r:id="rId114">
               <p14:nvContentPartPr>
                 <p14:cNvPr id="115" name="Ink 114">
                   <a:extLst>
@@ -31538,7 +32052,7 @@
                 <p:nvPr/>
               </p:nvPicPr>
               <p:blipFill>
-                <a:blip r:embed="rId45"/>
+                <a:blip r:embed="rId46"/>
                 <a:stretch>
                   <a:fillRect/>
                 </a:stretch>
